--- a/presentation/Cadence_Case_Study_Solution.pptx
+++ b/presentation/Cadence_Case_Study_Solution.pptx
@@ -3128,7 +3128,7 @@
               </a:defRPr>
             </a:pPr>
             <a:r>
-              <a:t>Protecting personal data in Cadence evidence</a:t>
+              <a:t>Protecting personal data in Caddet evidence</a:t>
             </a:r>
           </a:p>
         </p:txBody>
@@ -3226,7 +3226,7 @@
               </a:defRPr>
             </a:pPr>
             <a:r>
-              <a:t>Cadence Case Study 2 | 1</a:t>
+              <a:t>Caddet Case Study 2 | 1</a:t>
             </a:r>
           </a:p>
         </p:txBody>
@@ -3391,7 +3391,7 @@
               </a:defRPr>
             </a:pPr>
             <a:r>
-              <a:t>Cadence Case Study 2 | 10</a:t>
+              <a:t>Caddet Case Study 2 | 10</a:t>
             </a:r>
           </a:p>
         </p:txBody>
@@ -3556,7 +3556,7 @@
               </a:defRPr>
             </a:pPr>
             <a:r>
-              <a:t>Cadence Case Study 2 | 2</a:t>
+              <a:t>Caddet Case Study 2 | 2</a:t>
             </a:r>
           </a:p>
         </p:txBody>
@@ -4361,7 +4361,7 @@
               </a:defRPr>
             </a:pPr>
             <a:r>
-              <a:t>Cadence Case Study 2 | 3</a:t>
+              <a:t>Caddet Case Study 2 | 3</a:t>
             </a:r>
           </a:p>
         </p:txBody>
@@ -5303,7 +5303,7 @@
               </a:defRPr>
             </a:pPr>
             <a:r>
-              <a:t>Cadence Case Study 2 | 4</a:t>
+              <a:t>Caddet Case Study 2 | 4</a:t>
             </a:r>
           </a:p>
         </p:txBody>
@@ -5468,7 +5468,7 @@
               </a:defRPr>
             </a:pPr>
             <a:r>
-              <a:t>Cadence Case Study 2 | 5</a:t>
+              <a:t>Caddet Case Study 2 | 5</a:t>
             </a:r>
           </a:p>
         </p:txBody>
@@ -5633,7 +5633,7 @@
               </a:defRPr>
             </a:pPr>
             <a:r>
-              <a:t>Cadence Case Study 2 | 6</a:t>
+              <a:t>Caddet Case Study 2 | 6</a:t>
             </a:r>
           </a:p>
         </p:txBody>
@@ -5798,7 +5798,7 @@
               </a:defRPr>
             </a:pPr>
             <a:r>
-              <a:t>Cadence Case Study 2 | 7</a:t>
+              <a:t>Caddet Case Study 2 | 7</a:t>
             </a:r>
           </a:p>
         </p:txBody>
@@ -5963,7 +5963,7 @@
               </a:defRPr>
             </a:pPr>
             <a:r>
-              <a:t>Cadence Case Study 2 | 8</a:t>
+              <a:t>Caddet Case Study 2 | 8</a:t>
             </a:r>
           </a:p>
         </p:txBody>
@@ -6128,7 +6128,7 @@
               </a:defRPr>
             </a:pPr>
             <a:r>
-              <a:t>Cadence Case Study 2 | 9</a:t>
+              <a:t>Caddet Case Study 2 | 9</a:t>
             </a:r>
           </a:p>
         </p:txBody>
